--- a/4.3/slides/P3_N5_Capstone.pptx
+++ b/4.3/slides/P3_N5_Capstone.pptx
@@ -17,6 +17,8 @@
     <p:sldId id="260" r:id="rId13"/>
     <p:sldId id="261" r:id="rId14"/>
     <p:sldId id="262" r:id="rId15"/>
+    <p:sldId id="263" r:id="rId16"/>
+    <p:sldId id="264" r:id="rId9"/>
   </p:sldIdLst>
   <p:sldSz cy="6858000" cx="12192000"/>
   <p:notesSz cx="6858000" cy="9144000"/>
@@ -1859,26 +1861,571 @@
           </a:bodyPr>
           <a:lstStyle/>
           <a:p>
-            <a:pPr indent="0" lvl="0" marL="0" rtl="0" algn="l">
-              <a:lnSpc>
-                <a:spcPct val="100000"/>
-              </a:lnSpc>
-              <a:spcBef>
-                <a:spcPts val="0"/>
-              </a:spcBef>
-              <a:spcAft>
-                <a:spcPts val="0"/>
-              </a:spcAft>
-              <a:buSzPts val="1400"/>
-              <a:buNone/>
-            </a:pPr>
             <a:r>
-              <a:rPr lang="en-US"/>
-              <a:t> </a:t>
+              <a:t>Open the capstone by lowering the stakes on 'new material': there's almost none. This is INTEGRATION — every box is a notebook they already built. The novelty is the closed LOOP on real data, where small errors compound. Promise the payoff up front: a live demo where they tune knobs and watch the car thread real obstacles or clip one.</a:t>
             </a:r>
-            <a:endParaRPr/>
           </a:p>
         </p:txBody>
+      </p:sp>
+    </p:spTree>
+  </p:cSld>
+  <p:clrMapOvr>
+    <a:masterClrMapping/>
+  </p:clrMapOvr>
+</p:notes>
+</file>
+
+<file path=ppt/notesSlides/notesSlide2.xml><?xml version="1.0" encoding="utf-8"?>
+<p:notes xmlns:a="http://schemas.openxmlformats.org/drawingml/2006/main" xmlns:p="http://schemas.openxmlformats.org/presentationml/2006/main" xmlns:r="http://schemas.openxmlformats.org/officeDocument/2006/relationships">
+  <p:cSld>
+    <p:spTree>
+      <p:nvGrpSpPr>
+        <p:cNvPr id="1" name=""/>
+        <p:cNvGrpSpPr/>
+        <p:nvPr/>
+      </p:nvGrpSpPr>
+      <p:grpSpPr>
+        <a:xfrm>
+          <a:off x="0" y="0"/>
+          <a:ext cx="0" cy="0"/>
+          <a:chOff x="0" y="0"/>
+          <a:chExt cx="0" cy="0"/>
+        </a:xfrm>
+      </p:grpSpPr>
+      <p:sp>
+        <p:nvSpPr>
+          <p:cNvPr id="2" name="Slide Image Placeholder 1"/>
+          <p:cNvSpPr>
+            <a:spLocks noGrp="1"/>
+          </p:cNvSpPr>
+          <p:nvPr>
+            <p:ph type="sldImg" idx="3"/>
+          </p:nvPr>
+        </p:nvSpPr>
+        <p:spPr/>
+      </p:sp>
+      <p:sp>
+        <p:nvSpPr>
+          <p:cNvPr id="3" name="Notes Placeholder 2"/>
+          <p:cNvSpPr>
+            <a:spLocks noGrp="1"/>
+          </p:cNvSpPr>
+          <p:nvPr>
+            <p:ph type="body" idx="1"/>
+          </p:nvPr>
+        </p:nvSpPr>
+        <p:spPr/>
+        <p:txBody>
+          <a:bodyPr/>
+          <a:lstStyle/>
+          <a:p>
+            <a:r>
+              <a:t>Point at each box and name the notebook: Sense+Fuse = N1, Estimate = N2, Track = N3, Act = N4. The new word is 'loop' — control changes the next frame's perception, so unlike the isolated notebooks, errors COMPOUND here. That's the whole reason estimation and a safety layer matter. Stress 'emergent': we don't script a crash; outcomes fall out of the knobs you set. 10 Hz, deterministic given a seed.</a:t>
+            </a:r>
+          </a:p>
+        </p:txBody>
+      </p:sp>
+      <p:sp>
+        <p:nvSpPr>
+          <p:cNvPr id="4" name="Slide Number Placeholder 3"/>
+          <p:cNvSpPr>
+            <a:spLocks noGrp="1"/>
+          </p:cNvSpPr>
+          <p:nvPr>
+            <p:ph type="sldNum" idx="12"/>
+          </p:nvPr>
+        </p:nvSpPr>
+        <p:spPr/>
+      </p:sp>
+    </p:spTree>
+  </p:cSld>
+  <p:clrMapOvr>
+    <a:masterClrMapping/>
+  </p:clrMapOvr>
+</p:notes>
+</file>
+
+<file path=ppt/notesSlides/notesSlide3.xml><?xml version="1.0" encoding="utf-8"?>
+<p:notes xmlns:a="http://schemas.openxmlformats.org/drawingml/2006/main" xmlns:p="http://schemas.openxmlformats.org/presentationml/2006/main" xmlns:r="http://schemas.openxmlformats.org/officeDocument/2006/relationships">
+  <p:cSld>
+    <p:spTree>
+      <p:nvGrpSpPr>
+        <p:cNvPr id="1" name=""/>
+        <p:cNvGrpSpPr/>
+        <p:nvPr/>
+      </p:nvGrpSpPr>
+      <p:grpSpPr>
+        <a:xfrm>
+          <a:off x="0" y="0"/>
+          <a:ext cx="0" cy="0"/>
+          <a:chOff x="0" y="0"/>
+          <a:chExt cx="0" cy="0"/>
+        </a:xfrm>
+      </p:grpSpPr>
+      <p:sp>
+        <p:nvSpPr>
+          <p:cNvPr id="2" name="Slide Image Placeholder 1"/>
+          <p:cNvSpPr>
+            <a:spLocks noGrp="1"/>
+          </p:cNvSpPr>
+          <p:nvPr>
+            <p:ph type="sldImg" idx="3"/>
+          </p:nvPr>
+        </p:nvSpPr>
+        <p:spPr/>
+      </p:sp>
+      <p:sp>
+        <p:nvSpPr>
+          <p:cNvPr id="3" name="Notes Placeholder 2"/>
+          <p:cNvSpPr>
+            <a:spLocks noGrp="1"/>
+          </p:cNvSpPr>
+          <p:nvPr>
+            <p:ph type="body" idx="1"/>
+          </p:nvPr>
+        </p:nvSpPr>
+        <p:spPr/>
+        <p:txBody>
+          <a:bodyPr/>
+          <a:lstStyle/>
+          <a:p>
+            <a:r>
+              <a:t>Be honest about the modeling choice — students respect it. N3's REAL detections are mostly oncoming/parked traffic off to the sides; the recorded car drove a clear lane, so literally replaying them gives a boring demo. So we take the real SIZES (4.2x1.8x1.5 m straight from N3's clustering gates) and deliberately PLACE cars on the route. Crucial point: the ego doesn't get truth — it senses noisy detections and TRACKS them (reusing N3's tracker), then steers around the tracked estimate. That's why perception quality will matter in the blackout demo.</a:t>
+            </a:r>
+          </a:p>
+        </p:txBody>
+      </p:sp>
+      <p:sp>
+        <p:nvSpPr>
+          <p:cNvPr id="4" name="Slide Number Placeholder 3"/>
+          <p:cNvSpPr>
+            <a:spLocks noGrp="1"/>
+          </p:cNvSpPr>
+          <p:nvPr>
+            <p:ph type="sldNum" idx="12"/>
+          </p:nvPr>
+        </p:nvSpPr>
+        <p:spPr/>
+      </p:sp>
+    </p:spTree>
+  </p:cSld>
+  <p:clrMapOvr>
+    <a:masterClrMapping/>
+  </p:clrMapOvr>
+</p:notes>
+</file>
+
+<file path=ppt/notesSlides/notesSlide4.xml><?xml version="1.0" encoding="utf-8"?>
+<p:notes xmlns:a="http://schemas.openxmlformats.org/drawingml/2006/main" xmlns:p="http://schemas.openxmlformats.org/presentationml/2006/main" xmlns:r="http://schemas.openxmlformats.org/officeDocument/2006/relationships">
+  <p:cSld>
+    <p:spTree>
+      <p:nvGrpSpPr>
+        <p:cNvPr id="1" name=""/>
+        <p:cNvGrpSpPr/>
+        <p:nvPr/>
+      </p:nvGrpSpPr>
+      <p:grpSpPr>
+        <a:xfrm>
+          <a:off x="0" y="0"/>
+          <a:ext cx="0" cy="0"/>
+          <a:chOff x="0" y="0"/>
+          <a:chExt cx="0" cy="0"/>
+        </a:xfrm>
+      </p:grpSpPr>
+      <p:sp>
+        <p:nvSpPr>
+          <p:cNvPr id="2" name="Slide Image Placeholder 1"/>
+          <p:cNvSpPr>
+            <a:spLocks noGrp="1"/>
+          </p:cNvSpPr>
+          <p:nvPr>
+            <p:ph type="sldImg" idx="3"/>
+          </p:nvPr>
+        </p:nvSpPr>
+        <p:spPr/>
+      </p:sp>
+      <p:sp>
+        <p:nvSpPr>
+          <p:cNvPr id="3" name="Notes Placeholder 2"/>
+          <p:cNvSpPr>
+            <a:spLocks noGrp="1"/>
+          </p:cNvSpPr>
+          <p:nvPr>
+            <p:ph type="body" idx="1"/>
+          </p:nvPr>
+        </p:nvSpPr>
+        <p:spPr/>
+        <p:txBody>
+          <a:bodyPr/>
+          <a:lstStyle/>
+          <a:p>
+            <a:r>
+              <a:t>Reassure them: nothing new — this is N2's Kalman filter, verbatim, run once per obstacle in the bird's-eye plane. State is position AND velocity even though the cars are static, because the filter doesn't know that — it estimates velocity from the noisy detections (and it'll read near zero). Predict with the constant-velocity F, correct with the position measurement z. One extra piece from N3: when there are several cars you must decide which detection updates which track — that's the Hungarian assignment with a 3 m gate. Coasting under dropout is the same predict-without-update trick — foreshadow the blackout demo.</a:t>
+            </a:r>
+          </a:p>
+        </p:txBody>
+      </p:sp>
+      <p:sp>
+        <p:nvSpPr>
+          <p:cNvPr id="4" name="Slide Number Placeholder 3"/>
+          <p:cNvSpPr>
+            <a:spLocks noGrp="1"/>
+          </p:cNvSpPr>
+          <p:nvPr>
+            <p:ph type="sldNum" idx="12"/>
+          </p:nvPr>
+        </p:nvSpPr>
+        <p:spPr/>
+      </p:sp>
+    </p:spTree>
+  </p:cSld>
+  <p:clrMapOvr>
+    <a:masterClrMapping/>
+  </p:clrMapOvr>
+</p:notes>
+</file>
+
+<file path=ppt/notesSlides/notesSlide5.xml><?xml version="1.0" encoding="utf-8"?>
+<p:notes xmlns:a="http://schemas.openxmlformats.org/drawingml/2006/main" xmlns:p="http://schemas.openxmlformats.org/presentationml/2006/main" xmlns:r="http://schemas.openxmlformats.org/officeDocument/2006/relationships">
+  <p:cSld>
+    <p:spTree>
+      <p:nvGrpSpPr>
+        <p:cNvPr id="1" name=""/>
+        <p:cNvGrpSpPr/>
+        <p:nvPr/>
+      </p:nvGrpSpPr>
+      <p:grpSpPr>
+        <a:xfrm>
+          <a:off x="0" y="0"/>
+          <a:ext cx="0" cy="0"/>
+          <a:chOff x="0" y="0"/>
+          <a:chExt cx="0" cy="0"/>
+        </a:xfrm>
+      </p:grpSpPr>
+      <p:sp>
+        <p:nvSpPr>
+          <p:cNvPr id="2" name="Slide Image Placeholder 1"/>
+          <p:cNvSpPr>
+            <a:spLocks noGrp="1"/>
+          </p:cNvSpPr>
+          <p:nvPr>
+            <p:ph type="sldImg" idx="3"/>
+          </p:nvPr>
+        </p:nvSpPr>
+        <p:spPr/>
+      </p:sp>
+      <p:sp>
+        <p:nvSpPr>
+          <p:cNvPr id="3" name="Notes Placeholder 2"/>
+          <p:cNvSpPr>
+            <a:spLocks noGrp="1"/>
+          </p:cNvSpPr>
+          <p:nvPr>
+            <p:ph type="body" idx="1"/>
+          </p:nvPr>
+        </p:nvSpPr>
+        <p:spPr/>
+        <p:txBody>
+          <a:bodyPr/>
+          <a:lstStyle/>
+          <a:p>
+            <a:r>
+              <a:t>Analogy: imagine each obstacle gives off a 'wind' that pushes you sideways — stronger the closer and more head-on it is. Point at the figure: the obstacle in the forward corridor, the repulsion arrows, the resulting swerve. The ego steers with pure pursuit toward the path AND gets this sideways push; the sum makes it weave around and settle back. One knob: the gain. Keep the emergency brake as the backstop for the case it can't swerve in time (dead ahead). Note this is a REACTIVE method — no replanning — which is why it's cheap and runs every tick.</a:t>
+            </a:r>
+          </a:p>
+        </p:txBody>
+      </p:sp>
+      <p:sp>
+        <p:nvSpPr>
+          <p:cNvPr id="4" name="Slide Number Placeholder 3"/>
+          <p:cNvSpPr>
+            <a:spLocks noGrp="1"/>
+          </p:cNvSpPr>
+          <p:nvPr>
+            <p:ph type="sldNum" idx="12"/>
+          </p:nvPr>
+        </p:nvSpPr>
+        <p:spPr/>
+      </p:sp>
+    </p:spTree>
+  </p:cSld>
+  <p:clrMapOvr>
+    <a:masterClrMapping/>
+  </p:clrMapOvr>
+</p:notes>
+</file>
+
+<file path=ppt/notesSlides/notesSlide6.xml><?xml version="1.0" encoding="utf-8"?>
+<p:notes xmlns:a="http://schemas.openxmlformats.org/drawingml/2006/main" xmlns:p="http://schemas.openxmlformats.org/presentationml/2006/main" xmlns:r="http://schemas.openxmlformats.org/officeDocument/2006/relationships">
+  <p:cSld>
+    <p:spTree>
+      <p:nvGrpSpPr>
+        <p:cNvPr id="1" name=""/>
+        <p:cNvGrpSpPr/>
+        <p:nvPr/>
+      </p:nvGrpSpPr>
+      <p:grpSpPr>
+        <a:xfrm>
+          <a:off x="0" y="0"/>
+          <a:ext cx="0" cy="0"/>
+          <a:chOff x="0" y="0"/>
+          <a:chExt cx="0" cy="0"/>
+        </a:xfrm>
+      </p:grpSpPr>
+      <p:sp>
+        <p:nvSpPr>
+          <p:cNvPr id="2" name="Slide Image Placeholder 1"/>
+          <p:cNvSpPr>
+            <a:spLocks noGrp="1"/>
+          </p:cNvSpPr>
+          <p:nvPr>
+            <p:ph type="sldImg" idx="3"/>
+          </p:nvPr>
+        </p:nvSpPr>
+        <p:spPr/>
+      </p:sp>
+      <p:sp>
+        <p:nvSpPr>
+          <p:cNvPr id="3" name="Notes Placeholder 2"/>
+          <p:cNvSpPr>
+            <a:spLocks noGrp="1"/>
+          </p:cNvSpPr>
+          <p:nvPr>
+            <p:ph type="body" idx="1"/>
+          </p:nvPr>
+        </p:nvSpPr>
+        <p:spPr/>
+        <p:txBody>
+          <a:bodyPr/>
+          <a:lstStyle/>
+          <a:p>
+            <a:r>
+              <a:t>Decode the formula piece by piece. The sum is over obstacles in the corridor. sign(l_i): l is the lateral offset — if the car is on your left (l&gt;0) the minus-sign makes the bias negative = steer right, away from it. The two parenthesised factors are the weighting: (1 - f/f_max) means closer = stronger; (1 - |l|/c) means more head-on (small lateral) = stronger, edge-of-corridor = near zero so it fades smoothly. Then the punchline second line: the actual steer is just pursuit PLUS avoidance, clipped to the wheel limit. That superposition is the whole trick.</a:t>
+            </a:r>
+          </a:p>
+        </p:txBody>
+      </p:sp>
+      <p:sp>
+        <p:nvSpPr>
+          <p:cNvPr id="4" name="Slide Number Placeholder 3"/>
+          <p:cNvSpPr>
+            <a:spLocks noGrp="1"/>
+          </p:cNvSpPr>
+          <p:nvPr>
+            <p:ph type="sldNum" idx="12"/>
+          </p:nvPr>
+        </p:nvSpPr>
+        <p:spPr/>
+      </p:sp>
+    </p:spTree>
+  </p:cSld>
+  <p:clrMapOvr>
+    <a:masterClrMapping/>
+  </p:clrMapOvr>
+</p:notes>
+</file>
+
+<file path=ppt/notesSlides/notesSlide7.xml><?xml version="1.0" encoding="utf-8"?>
+<p:notes xmlns:a="http://schemas.openxmlformats.org/drawingml/2006/main" xmlns:p="http://schemas.openxmlformats.org/presentationml/2006/main" xmlns:r="http://schemas.openxmlformats.org/officeDocument/2006/relationships">
+  <p:cSld>
+    <p:spTree>
+      <p:nvGrpSpPr>
+        <p:cNvPr id="1" name=""/>
+        <p:cNvGrpSpPr/>
+        <p:nvPr/>
+      </p:nvGrpSpPr>
+      <p:grpSpPr>
+        <a:xfrm>
+          <a:off x="0" y="0"/>
+          <a:ext cx="0" cy="0"/>
+          <a:chOff x="0" y="0"/>
+          <a:chExt cx="0" cy="0"/>
+        </a:xfrm>
+      </p:grpSpPr>
+      <p:sp>
+        <p:nvSpPr>
+          <p:cNvPr id="2" name="Slide Image Placeholder 1"/>
+          <p:cNvSpPr>
+            <a:spLocks noGrp="1"/>
+          </p:cNvSpPr>
+          <p:nvPr>
+            <p:ph type="sldImg" idx="3"/>
+          </p:nvPr>
+        </p:nvSpPr>
+        <p:spPr/>
+      </p:sp>
+      <p:sp>
+        <p:nvSpPr>
+          <p:cNvPr id="3" name="Notes Placeholder 2"/>
+          <p:cNvSpPr>
+            <a:spLocks noGrp="1"/>
+          </p:cNvSpPr>
+          <p:nvPr>
+            <p:ph type="body" idx="1"/>
+          </p:nvPr>
+        </p:nvSpPr>
+        <p:spPr/>
+        <p:txBody>
+          <a:bodyPr/>
+          <a:lstStyle/>
+          <a:p>
+            <a:r>
+              <a:t>Orient them to the view since it's the one they'll stare at in the demo: forward is UP, you (blue triangle) sit near the bottom so you can see a little behind, the gray ribbon is the route, red boxes are obstacles, the blue trail is where you've been. It deliberately matches N3's bird's-eye convention so the whole workshop shares one mental picture. Mention the trail toggle — it's great for seeing WHAT the controller did after the fact.</a:t>
+            </a:r>
+          </a:p>
+        </p:txBody>
+      </p:sp>
+      <p:sp>
+        <p:nvSpPr>
+          <p:cNvPr id="4" name="Slide Number Placeholder 3"/>
+          <p:cNvSpPr>
+            <a:spLocks noGrp="1"/>
+          </p:cNvSpPr>
+          <p:nvPr>
+            <p:ph type="sldNum" idx="12"/>
+          </p:nvPr>
+        </p:nvSpPr>
+        <p:spPr/>
+      </p:sp>
+    </p:spTree>
+  </p:cSld>
+  <p:clrMapOvr>
+    <a:masterClrMapping/>
+  </p:clrMapOvr>
+</p:notes>
+</file>
+
+<file path=ppt/notesSlides/notesSlide8.xml><?xml version="1.0" encoding="utf-8"?>
+<p:notes xmlns:a="http://schemas.openxmlformats.org/drawingml/2006/main" xmlns:p="http://schemas.openxmlformats.org/presentationml/2006/main" xmlns:r="http://schemas.openxmlformats.org/officeDocument/2006/relationships">
+  <p:cSld>
+    <p:spTree>
+      <p:nvGrpSpPr>
+        <p:cNvPr id="1" name=""/>
+        <p:cNvGrpSpPr/>
+        <p:nvPr/>
+      </p:nvGrpSpPr>
+      <p:grpSpPr>
+        <a:xfrm>
+          <a:off x="0" y="0"/>
+          <a:ext cx="0" cy="0"/>
+          <a:chOff x="0" y="0"/>
+          <a:chExt cx="0" cy="0"/>
+        </a:xfrm>
+      </p:grpSpPr>
+      <p:sp>
+        <p:nvSpPr>
+          <p:cNvPr id="2" name="Slide Image Placeholder 1"/>
+          <p:cNvSpPr>
+            <a:spLocks noGrp="1"/>
+          </p:cNvSpPr>
+          <p:nvPr>
+            <p:ph type="sldImg" idx="3"/>
+          </p:nvPr>
+        </p:nvSpPr>
+        <p:spPr/>
+      </p:sp>
+      <p:sp>
+        <p:nvSpPr>
+          <p:cNvPr id="3" name="Notes Placeholder 2"/>
+          <p:cNvSpPr>
+            <a:spLocks noGrp="1"/>
+          </p:cNvSpPr>
+          <p:nvPr>
+            <p:ph type="body" idx="1"/>
+          </p:nvPr>
+        </p:nvSpPr>
+        <p:spPr/>
+        <p:txBody>
+          <a:bodyPr/>
+          <a:lstStyle/>
+          <a:p>
+            <a:r>
+              <a:t>This is the heart of the session — spend real time here, live. The figure is the money shot: avoidance OFF the ego drives straight into a car (red X); ON it weaves through. Demo script: (1) start with avoidance ON, clean thread; (2) turn avoidance OFF -&gt; clip, to motivate why we built it; (3) back ON, then crank sensor noise or open a BLACKOUT window and watch it clip a car it can't see — that's the 'estimation quality gates safety' lesson made visceral; (4) push the avoidance gain too high and show oscillation. Then hand it to them: 'now you break it.'</a:t>
+            </a:r>
+          </a:p>
+        </p:txBody>
+      </p:sp>
+      <p:sp>
+        <p:nvSpPr>
+          <p:cNvPr id="4" name="Slide Number Placeholder 3"/>
+          <p:cNvSpPr>
+            <a:spLocks noGrp="1"/>
+          </p:cNvSpPr>
+          <p:nvPr>
+            <p:ph type="sldNum" idx="12"/>
+          </p:nvPr>
+        </p:nvSpPr>
+        <p:spPr/>
+      </p:sp>
+    </p:spTree>
+  </p:cSld>
+  <p:clrMapOvr>
+    <a:masterClrMapping/>
+  </p:clrMapOvr>
+</p:notes>
+</file>
+
+<file path=ppt/notesSlides/notesSlide9.xml><?xml version="1.0" encoding="utf-8"?>
+<p:notes xmlns:a="http://schemas.openxmlformats.org/drawingml/2006/main" xmlns:p="http://schemas.openxmlformats.org/presentationml/2006/main" xmlns:r="http://schemas.openxmlformats.org/officeDocument/2006/relationships">
+  <p:cSld>
+    <p:spTree>
+      <p:nvGrpSpPr>
+        <p:cNvPr id="1" name=""/>
+        <p:cNvGrpSpPr/>
+        <p:nvPr/>
+      </p:nvGrpSpPr>
+      <p:grpSpPr>
+        <a:xfrm>
+          <a:off x="0" y="0"/>
+          <a:ext cx="0" cy="0"/>
+          <a:chOff x="0" y="0"/>
+          <a:chExt cx="0" cy="0"/>
+        </a:xfrm>
+      </p:grpSpPr>
+      <p:sp>
+        <p:nvSpPr>
+          <p:cNvPr id="2" name="Slide Image Placeholder 1"/>
+          <p:cNvSpPr>
+            <a:spLocks noGrp="1"/>
+          </p:cNvSpPr>
+          <p:nvPr>
+            <p:ph type="sldImg" idx="3"/>
+          </p:nvPr>
+        </p:nvSpPr>
+        <p:spPr/>
+      </p:sp>
+      <p:sp>
+        <p:nvSpPr>
+          <p:cNvPr id="3" name="Notes Placeholder 2"/>
+          <p:cNvSpPr>
+            <a:spLocks noGrp="1"/>
+          </p:cNvSpPr>
+          <p:nvPr>
+            <p:ph type="body" idx="1"/>
+          </p:nvPr>
+        </p:nvSpPr>
+        <p:spPr/>
+        <p:txBody>
+          <a:bodyPr/>
+          <a:lstStyle/>
+          <a:p>
+            <a:r>
+              <a:t>Land the plane. Restate the arc one last time — they personally built every stage, on real KITTI data, and wired it into a loop that drives. The meta-lesson is MODULARITY: each piece sat behind a clean interface, so you can swap the detector or the controller without touching the rest — exactly why production autonomy stacks are built this way and stay auditable. One forward-looking sentence: the frontier (end-to-end learned driving) replaces these hand-built boxes with one network — higher ceiling, but you lose the ability to inspect WHY it did something. Thank them; send them to the notebook to go break the simulator.</a:t>
+            </a:r>
+          </a:p>
+        </p:txBody>
+      </p:sp>
+      <p:sp>
+        <p:nvSpPr>
+          <p:cNvPr id="4" name="Slide Number Placeholder 3"/>
+          <p:cNvSpPr>
+            <a:spLocks noGrp="1"/>
+          </p:cNvSpPr>
+          <p:nvPr>
+            <p:ph type="sldNum" idx="12"/>
+          </p:nvPr>
+        </p:nvSpPr>
+        <p:spPr/>
       </p:sp>
     </p:spTree>
   </p:cSld>
@@ -30861,8 +31408,8 @@
         </p:nvSpPr>
         <p:spPr>
           <a:xfrm>
-            <a:off x="566928" y="1600200"/>
-            <a:ext cx="11064240" cy="4663440"/>
+            <a:off x="502920" y="1600200"/>
+            <a:ext cx="4297680" cy="4572000"/>
           </a:xfrm>
           <a:prstGeom prst="rect">
             <a:avLst/>
@@ -30877,24 +31424,24 @@
           <a:p>
             <a:pPr>
               <a:spcAft>
-                <a:spcPts val="800"/>
+                <a:spcPts val="700"/>
               </a:spcAft>
             </a:pPr>
             <a:r>
               <a:rPr sz="1800">
                 <a:latin typeface="Verdana"/>
               </a:rPr>
-              <a:t>N1 fuse -&gt; N2 estimate -&gt; N3 track -&gt; N4 act, wired into one running loop on the real KITTI drive.</a:t>
+              <a:t>N1 fuse → N2 estimate → N3 track → N4 act, wired into one running loop on the real KITTI drive.</a:t>
             </a:r>
           </a:p>
           <a:p>
             <a:pPr>
               <a:spcAft>
-                <a:spcPts val="800"/>
+                <a:spcPts val="700"/>
               </a:spcAft>
             </a:pPr>
             <a:r>
-              <a:rPr sz="1600">
+              <a:rPr sz="1500">
                 <a:latin typeface="Verdana"/>
               </a:rPr>
               <a:t>•  No new theory — this is integration</a:t>
@@ -30903,11 +31450,11 @@
           <a:p>
             <a:pPr>
               <a:spcAft>
-                <a:spcPts val="800"/>
+                <a:spcPts val="700"/>
               </a:spcAft>
             </a:pPr>
             <a:r>
-              <a:rPr sz="1600">
+              <a:rPr sz="1500">
                 <a:latin typeface="Verdana"/>
               </a:rPr>
               <a:t>•  Real ego route, real-derived obstacles</a:t>
@@ -30916,11 +31463,11 @@
           <a:p>
             <a:pPr>
               <a:spcAft>
-                <a:spcPts val="800"/>
+                <a:spcPts val="700"/>
               </a:spcAft>
             </a:pPr>
             <a:r>
-              <a:rPr sz="1600">
+              <a:rPr sz="1500">
                 <a:latin typeface="Verdana"/>
               </a:rPr>
               <a:t>•  Emergent thread-or-clip outcomes</a:t>
@@ -30928,6 +31475,30 @@
           </a:p>
         </p:txBody>
       </p:sp>
+      <p:pic>
+        <p:nvPicPr>
+          <p:cNvPr id="4" name="Picture 3" descr="n5_loop.png"/>
+          <p:cNvPicPr>
+            <a:picLocks noChangeAspect="1"/>
+          </p:cNvPicPr>
+          <p:nvPr/>
+        </p:nvPicPr>
+        <p:blipFill>
+          <a:blip r:embed="rId2"/>
+          <a:stretch>
+            <a:fillRect/>
+          </a:stretch>
+        </p:blipFill>
+        <p:spPr>
+          <a:xfrm>
+            <a:off x="4983480" y="2939423"/>
+            <a:ext cx="6766559" cy="2076433"/>
+          </a:xfrm>
+          <a:prstGeom prst="rect">
+            <a:avLst/>
+          </a:prstGeom>
+        </p:spPr>
+      </p:pic>
     </p:spTree>
   </p:cSld>
   <p:clrMapOvr>
@@ -30978,8 +31549,8 @@
         </p:nvSpPr>
         <p:spPr>
           <a:xfrm>
-            <a:off x="566928" y="1600200"/>
-            <a:ext cx="11064240" cy="4663440"/>
+            <a:off x="502920" y="1600200"/>
+            <a:ext cx="4297680" cy="4572000"/>
           </a:xfrm>
           <a:prstGeom prst="rect">
             <a:avLst/>
@@ -30994,7 +31565,7 @@
           <a:p>
             <a:pPr>
               <a:spcAft>
-                <a:spcPts val="800"/>
+                <a:spcPts val="700"/>
               </a:spcAft>
             </a:pPr>
             <a:r>
@@ -31007,24 +31578,24 @@
           <a:p>
             <a:pPr>
               <a:spcAft>
-                <a:spcPts val="800"/>
+                <a:spcPts val="700"/>
               </a:spcAft>
             </a:pPr>
             <a:r>
-              <a:rPr sz="1600">
+              <a:rPr sz="1500">
                 <a:latin typeface="Verdana"/>
               </a:rPr>
-              <a:t>•  Car ~ 4.2 x 1.8 x 1.5 m (from N3's clustering)</a:t>
+              <a:t>•  Car ≈ 4.2 × 1.8 × 1.5 m (from N3's clustering)</a:t>
             </a:r>
           </a:p>
           <a:p>
             <a:pPr>
               <a:spcAft>
-                <a:spcPts val="800"/>
+                <a:spcPts val="700"/>
               </a:spcAft>
             </a:pPr>
             <a:r>
-              <a:rPr sz="1600">
+              <a:rPr sz="1500">
                 <a:latin typeface="Verdana"/>
               </a:rPr>
               <a:t>•  Perceived with noise, then tracked</a:t>
@@ -31033,18 +31604,42 @@
           <a:p>
             <a:pPr>
               <a:spcAft>
-                <a:spcPts val="800"/>
+                <a:spcPts val="700"/>
               </a:spcAft>
             </a:pPr>
             <a:r>
-              <a:rPr sz="1600">
+              <a:rPr sz="1500">
                 <a:latin typeface="Verdana"/>
               </a:rPr>
-              <a:t>•  The ego steers around the tracked positions</a:t>
+              <a:t>•  Steer around the TRACKED positions</a:t>
             </a:r>
           </a:p>
         </p:txBody>
       </p:sp>
+      <p:pic>
+        <p:nvPicPr>
+          <p:cNvPr id="4" name="Picture 3" descr="n5_course.png"/>
+          <p:cNvPicPr>
+            <a:picLocks noChangeAspect="1"/>
+          </p:cNvPicPr>
+          <p:nvPr/>
+        </p:nvPicPr>
+        <p:blipFill>
+          <a:blip r:embed="rId2"/>
+          <a:stretch>
+            <a:fillRect/>
+          </a:stretch>
+        </p:blipFill>
+        <p:spPr>
+          <a:xfrm>
+            <a:off x="6749716" y="1417320"/>
+            <a:ext cx="3234088" cy="5120640"/>
+          </a:xfrm>
+          <a:prstGeom prst="rect">
+            <a:avLst/>
+          </a:prstGeom>
+        </p:spPr>
+      </p:pic>
     </p:spTree>
   </p:cSld>
   <p:clrMapOvr>
@@ -31082,7 +31677,7 @@
               <a:rPr>
                 <a:latin typeface="Verdana"/>
               </a:rPr>
-              <a:t>Steering around: potential field</a:t>
+              <a:t>Tracking the obstacles: constant-velocity Kalman</a:t>
             </a:r>
           </a:p>
         </p:txBody>
@@ -31095,8 +31690,8 @@
         </p:nvSpPr>
         <p:spPr>
           <a:xfrm>
-            <a:off x="566928" y="1600200"/>
-            <a:ext cx="11064240" cy="4663440"/>
+            <a:off x="566928" y="1417320"/>
+            <a:ext cx="11064240" cy="868680"/>
           </a:xfrm>
           <a:prstGeom prst="rect">
             <a:avLst/>
@@ -31111,53 +31706,100 @@
           <a:p>
             <a:pPr>
               <a:spcAft>
-                <a:spcPts val="800"/>
+                <a:spcPts val="700"/>
               </a:spcAft>
             </a:pPr>
             <a:r>
               <a:rPr sz="1800">
                 <a:latin typeface="Verdana"/>
               </a:rPr>
-              <a:t>Each obstacle in the corridor pushes the ego sideways; it weaves and re-centers.</a:t>
+              <a:t>The same N2 filter, one per obstacle, in the BEV plane.</a:t>
+            </a:r>
+          </a:p>
+        </p:txBody>
+      </p:sp>
+      <p:pic>
+        <p:nvPicPr>
+          <p:cNvPr id="4" name="Picture 3" descr="eq_kalman.png"/>
+          <p:cNvPicPr>
+            <a:picLocks noChangeAspect="1"/>
+          </p:cNvPicPr>
+          <p:nvPr/>
+        </p:nvPicPr>
+        <p:blipFill>
+          <a:blip r:embed="rId2"/>
+          <a:stretch>
+            <a:fillRect/>
+          </a:stretch>
+        </p:blipFill>
+        <p:spPr>
+          <a:xfrm>
+            <a:off x="2828203" y="2468880"/>
+            <a:ext cx="6413673" cy="2377440"/>
+          </a:xfrm>
+          <a:prstGeom prst="rect">
+            <a:avLst/>
+          </a:prstGeom>
+        </p:spPr>
+      </p:pic>
+      <p:sp>
+        <p:nvSpPr>
+          <p:cNvPr id="5" name="TextBox 4"/>
+          <p:cNvSpPr txBox="1"/>
+          <p:nvPr/>
+        </p:nvSpPr>
+        <p:spPr>
+          <a:xfrm>
+            <a:off x="566928" y="5120640"/>
+            <a:ext cx="11064240" cy="1371600"/>
+          </a:xfrm>
+          <a:prstGeom prst="rect">
+            <a:avLst/>
+          </a:prstGeom>
+          <a:noFill/>
+        </p:spPr>
+        <p:txBody>
+          <a:bodyPr wrap="square">
+            <a:spAutoFit/>
+          </a:bodyPr>
+          <a:lstStyle/>
+          <a:p>
+            <a:pPr>
+              <a:spcAft>
+                <a:spcPts val="700"/>
+              </a:spcAft>
+            </a:pPr>
+            <a:r>
+              <a:rPr sz="1500">
+                <a:latin typeface="Verdana"/>
+              </a:rPr>
+              <a:t>State = position + velocity [x, y, vx, vy]</a:t>
             </a:r>
           </a:p>
           <a:p>
             <a:pPr>
               <a:spcAft>
-                <a:spcPts val="800"/>
+                <a:spcPts val="700"/>
               </a:spcAft>
             </a:pPr>
             <a:r>
-              <a:rPr sz="1600">
+              <a:rPr sz="1400">
                 <a:latin typeface="Verdana"/>
               </a:rPr>
-              <a:t>•  One gain to tune (the avoidance strength)</a:t>
+              <a:t>•  Predict with F, correct with measurement z = [x, y]</a:t>
             </a:r>
           </a:p>
           <a:p>
             <a:pPr>
               <a:spcAft>
-                <a:spcPts val="800"/>
+                <a:spcPts val="700"/>
               </a:spcAft>
             </a:pPr>
             <a:r>
-              <a:rPr sz="1600">
+              <a:rPr sz="1400">
                 <a:latin typeface="Verdana"/>
               </a:rPr>
-              <a:t>•  Pure-pursuit steer + repulsion bias</a:t>
-            </a:r>
-          </a:p>
-          <a:p>
-            <a:pPr>
-              <a:spcAft>
-                <a:spcPts val="800"/>
-              </a:spcAft>
-            </a:pPr>
-            <a:r>
-              <a:rPr sz="1600">
-                <a:latin typeface="Verdana"/>
-              </a:rPr>
-              <a:t>•  Emergency brake if a car is dead-ahead</a:t>
+              <a:t>•  Hungarian assigns detections to tracks (gate 3 m)</a:t>
             </a:r>
           </a:p>
         </p:txBody>
@@ -31199,7 +31841,7 @@
               <a:rPr>
                 <a:latin typeface="Verdana"/>
               </a:rPr>
-              <a:t>The bird's-eye view</a:t>
+              <a:t>Steering around: potential field</a:t>
             </a:r>
           </a:p>
         </p:txBody>
@@ -31212,8 +31854,8 @@
         </p:nvSpPr>
         <p:spPr>
           <a:xfrm>
-            <a:off x="566928" y="1600200"/>
-            <a:ext cx="11064240" cy="4663440"/>
+            <a:off x="502920" y="1600200"/>
+            <a:ext cx="4297680" cy="4572000"/>
           </a:xfrm>
           <a:prstGeom prst="rect">
             <a:avLst/>
@@ -31228,57 +31870,81 @@
           <a:p>
             <a:pPr>
               <a:spcAft>
-                <a:spcPts val="800"/>
+                <a:spcPts val="700"/>
               </a:spcAft>
             </a:pPr>
             <a:r>
               <a:rPr sz="1800">
                 <a:latin typeface="Verdana"/>
               </a:rPr>
-              <a:t>Ego-relative — forward up, you at the bottom — exactly N3's BEV.</a:t>
+              <a:t>Each obstacle in the corridor pushes the ego sideways; it weaves and re-centers.</a:t>
             </a:r>
           </a:p>
           <a:p>
             <a:pPr>
               <a:spcAft>
-                <a:spcPts val="800"/>
+                <a:spcPts val="700"/>
               </a:spcAft>
             </a:pPr>
             <a:r>
-              <a:rPr sz="1600">
+              <a:rPr sz="1500">
                 <a:latin typeface="Verdana"/>
               </a:rPr>
-              <a:t>•  Green = road, red = obstacle</a:t>
+              <a:t>•  One gain to tune</a:t>
             </a:r>
           </a:p>
           <a:p>
             <a:pPr>
               <a:spcAft>
-                <a:spcPts val="800"/>
+                <a:spcPts val="700"/>
               </a:spcAft>
             </a:pPr>
             <a:r>
-              <a:rPr sz="1600">
+              <a:rPr sz="1500">
                 <a:latin typeface="Verdana"/>
               </a:rPr>
-              <a:t>•  Tracked detections shown with uncertainty</a:t>
+              <a:t>•  Pure-pursuit steer + repulsion bias</a:t>
             </a:r>
           </a:p>
           <a:p>
             <a:pPr>
               <a:spcAft>
-                <a:spcPts val="800"/>
+                <a:spcPts val="700"/>
               </a:spcAft>
             </a:pPr>
             <a:r>
-              <a:rPr sz="1600">
+              <a:rPr sz="1500">
                 <a:latin typeface="Verdana"/>
               </a:rPr>
-              <a:t>•  The real, curved KITTI route</a:t>
+              <a:t>•  Emergency brake if dead-ahead</a:t>
             </a:r>
           </a:p>
         </p:txBody>
       </p:sp>
+      <p:pic>
+        <p:nvPicPr>
+          <p:cNvPr id="4" name="Picture 3" descr="n5_potential.png"/>
+          <p:cNvPicPr>
+            <a:picLocks noChangeAspect="1"/>
+          </p:cNvPicPr>
+          <p:nvPr/>
+        </p:nvPicPr>
+        <p:blipFill>
+          <a:blip r:embed="rId2"/>
+          <a:stretch>
+            <a:fillRect/>
+          </a:stretch>
+        </p:blipFill>
+        <p:spPr>
+          <a:xfrm>
+            <a:off x="6116883" y="1417320"/>
+            <a:ext cx="4499753" cy="5120640"/>
+          </a:xfrm>
+          <a:prstGeom prst="rect">
+            <a:avLst/>
+          </a:prstGeom>
+        </p:spPr>
+      </p:pic>
     </p:spTree>
   </p:cSld>
   <p:clrMapOvr>
@@ -31316,7 +31982,7 @@
               <a:rPr>
                 <a:latin typeface="Verdana"/>
               </a:rPr>
-              <a:t>Live demo: tune the knobs</a:t>
+              <a:t>The repulsion field, in math</a:t>
             </a:r>
           </a:p>
         </p:txBody>
@@ -31329,8 +31995,8 @@
         </p:nvSpPr>
         <p:spPr>
           <a:xfrm>
-            <a:off x="566928" y="1600200"/>
-            <a:ext cx="11064240" cy="4663440"/>
+            <a:off x="566928" y="1417320"/>
+            <a:ext cx="11064240" cy="868680"/>
           </a:xfrm>
           <a:prstGeom prst="rect">
             <a:avLst/>
@@ -31345,53 +32011,100 @@
           <a:p>
             <a:pPr>
               <a:spcAft>
-                <a:spcPts val="800"/>
+                <a:spcPts val="700"/>
               </a:spcAft>
             </a:pPr>
             <a:r>
               <a:rPr sz="1800">
                 <a:latin typeface="Verdana"/>
               </a:rPr>
-              <a:t>Set the controls, render, watch it thread or clip.</a:t>
+              <a:t>Each obstacle in the corridor adds a signed steering bias.</a:t>
+            </a:r>
+          </a:p>
+        </p:txBody>
+      </p:sp>
+      <p:pic>
+        <p:nvPicPr>
+          <p:cNvPr id="4" name="Picture 3" descr="eq_potential.png"/>
+          <p:cNvPicPr>
+            <a:picLocks noChangeAspect="1"/>
+          </p:cNvPicPr>
+          <p:nvPr/>
+        </p:nvPicPr>
+        <p:blipFill>
+          <a:blip r:embed="rId2"/>
+          <a:stretch>
+            <a:fillRect/>
+          </a:stretch>
+        </p:blipFill>
+        <p:spPr>
+          <a:xfrm>
+            <a:off x="3401887" y="2468880"/>
+            <a:ext cx="5266306" cy="2377440"/>
+          </a:xfrm>
+          <a:prstGeom prst="rect">
+            <a:avLst/>
+          </a:prstGeom>
+        </p:spPr>
+      </p:pic>
+      <p:sp>
+        <p:nvSpPr>
+          <p:cNvPr id="5" name="TextBox 4"/>
+          <p:cNvSpPr txBox="1"/>
+          <p:nvPr/>
+        </p:nvSpPr>
+        <p:spPr>
+          <a:xfrm>
+            <a:off x="566928" y="5120640"/>
+            <a:ext cx="11064240" cy="1371600"/>
+          </a:xfrm>
+          <a:prstGeom prst="rect">
+            <a:avLst/>
+          </a:prstGeom>
+          <a:noFill/>
+        </p:spPr>
+        <p:txBody>
+          <a:bodyPr wrap="square">
+            <a:spAutoFit/>
+          </a:bodyPr>
+          <a:lstStyle/>
+          <a:p>
+            <a:pPr>
+              <a:spcAft>
+                <a:spcPts val="700"/>
+              </a:spcAft>
+            </a:pPr>
+            <a:r>
+              <a:rPr sz="1500">
+                <a:latin typeface="Verdana"/>
+              </a:rPr>
+              <a:t>sign(ℓ) pushes AWAY from the obstacle's side</a:t>
             </a:r>
           </a:p>
           <a:p>
             <a:pPr>
               <a:spcAft>
-                <a:spcPts val="800"/>
+                <a:spcPts val="700"/>
               </a:spcAft>
             </a:pPr>
             <a:r>
-              <a:rPr sz="1600">
+              <a:rPr sz="1400">
                 <a:latin typeface="Verdana"/>
               </a:rPr>
-              <a:t>•  Avoidance gain, lookahead, speed</a:t>
+              <a:t>•  Weighted by closeness (f) and centering (ℓ)</a:t>
             </a:r>
           </a:p>
           <a:p>
             <a:pPr>
               <a:spcAft>
-                <a:spcPts val="800"/>
+                <a:spcPts val="700"/>
               </a:spcAft>
             </a:pPr>
             <a:r>
-              <a:rPr sz="1600">
+              <a:rPr sz="1400">
                 <a:latin typeface="Verdana"/>
               </a:rPr>
-              <a:t>•  Number of cars / layout seed</a:t>
-            </a:r>
-          </a:p>
-          <a:p>
-            <a:pPr>
-              <a:spcAft>
-                <a:spcPts val="800"/>
-              </a:spcAft>
-            </a:pPr>
-            <a:r>
-              <a:rPr sz="1600">
-                <a:latin typeface="Verdana"/>
-              </a:rPr>
-              <a:t>•  Sensor noise / blackout</a:t>
+              <a:t>•  Total steer δ = pursuit + avoidance</a:t>
             </a:r>
           </a:p>
         </p:txBody>
@@ -31433,6 +32146,288 @@
               <a:rPr>
                 <a:latin typeface="Verdana"/>
               </a:rPr>
+              <a:t>The bird's-eye view</a:t>
+            </a:r>
+          </a:p>
+        </p:txBody>
+      </p:sp>
+      <p:sp>
+        <p:nvSpPr>
+          <p:cNvPr id="3" name="TextBox 2"/>
+          <p:cNvSpPr txBox="1"/>
+          <p:nvPr/>
+        </p:nvSpPr>
+        <p:spPr>
+          <a:xfrm>
+            <a:off x="502920" y="1600200"/>
+            <a:ext cx="4297680" cy="4572000"/>
+          </a:xfrm>
+          <a:prstGeom prst="rect">
+            <a:avLst/>
+          </a:prstGeom>
+          <a:noFill/>
+        </p:spPr>
+        <p:txBody>
+          <a:bodyPr wrap="square">
+            <a:spAutoFit/>
+          </a:bodyPr>
+          <a:lstStyle/>
+          <a:p>
+            <a:pPr>
+              <a:spcAft>
+                <a:spcPts val="700"/>
+              </a:spcAft>
+            </a:pPr>
+            <a:r>
+              <a:rPr sz="1800">
+                <a:latin typeface="Verdana"/>
+              </a:rPr>
+              <a:t>Ego-relative — forward up, you near the bottom — exactly N3's BEV.</a:t>
+            </a:r>
+          </a:p>
+          <a:p>
+            <a:pPr>
+              <a:spcAft>
+                <a:spcPts val="700"/>
+              </a:spcAft>
+            </a:pPr>
+            <a:r>
+              <a:rPr sz="1500">
+                <a:latin typeface="Verdana"/>
+              </a:rPr>
+              <a:t>•  Green = road, red = obstacle</a:t>
+            </a:r>
+          </a:p>
+          <a:p>
+            <a:pPr>
+              <a:spcAft>
+                <a:spcPts val="700"/>
+              </a:spcAft>
+            </a:pPr>
+            <a:r>
+              <a:rPr sz="1500">
+                <a:latin typeface="Verdana"/>
+              </a:rPr>
+              <a:t>•  Tracked detections + a trajectory trail</a:t>
+            </a:r>
+          </a:p>
+          <a:p>
+            <a:pPr>
+              <a:spcAft>
+                <a:spcPts val="700"/>
+              </a:spcAft>
+            </a:pPr>
+            <a:r>
+              <a:rPr sz="1500">
+                <a:latin typeface="Verdana"/>
+              </a:rPr>
+              <a:t>•  The real, curved KITTI route</a:t>
+            </a:r>
+          </a:p>
+        </p:txBody>
+      </p:sp>
+      <p:pic>
+        <p:nvPicPr>
+          <p:cNvPr id="4" name="Picture 3" descr="n5_bev.png"/>
+          <p:cNvPicPr>
+            <a:picLocks noChangeAspect="1"/>
+          </p:cNvPicPr>
+          <p:nvPr/>
+        </p:nvPicPr>
+        <p:blipFill>
+          <a:blip r:embed="rId2"/>
+          <a:stretch>
+            <a:fillRect/>
+          </a:stretch>
+        </p:blipFill>
+        <p:spPr>
+          <a:xfrm>
+            <a:off x="6314762" y="1417320"/>
+            <a:ext cx="4103996" cy="5120640"/>
+          </a:xfrm>
+          <a:prstGeom prst="rect">
+            <a:avLst/>
+          </a:prstGeom>
+        </p:spPr>
+      </p:pic>
+    </p:spTree>
+  </p:cSld>
+  <p:clrMapOvr>
+    <a:masterClrMapping/>
+  </p:clrMapOvr>
+</p:sld>
+</file>
+
+<file path=ppt/slides/slide8.xml><?xml version="1.0" encoding="utf-8"?>
+<p:sld xmlns:a="http://schemas.openxmlformats.org/drawingml/2006/main" xmlns:p="http://schemas.openxmlformats.org/presentationml/2006/main" xmlns:r="http://schemas.openxmlformats.org/officeDocument/2006/relationships">
+  <p:cSld>
+    <p:spTree>
+      <p:nvGrpSpPr>
+        <p:cNvPr id="1" name=""/>
+        <p:cNvGrpSpPr/>
+        <p:nvPr/>
+      </p:nvGrpSpPr>
+      <p:grpSpPr/>
+      <p:sp>
+        <p:nvSpPr>
+          <p:cNvPr id="2" name="Title 1"/>
+          <p:cNvSpPr>
+            <a:spLocks noGrp="1"/>
+          </p:cNvSpPr>
+          <p:nvPr>
+            <p:ph type="title"/>
+          </p:nvPr>
+        </p:nvSpPr>
+        <p:spPr/>
+        <p:txBody>
+          <a:bodyPr/>
+          <a:lstStyle/>
+          <a:p>
+            <a:r>
+              <a:rPr>
+                <a:latin typeface="Verdana"/>
+              </a:rPr>
+              <a:t>Live demo: tune the knobs</a:t>
+            </a:r>
+          </a:p>
+        </p:txBody>
+      </p:sp>
+      <p:sp>
+        <p:nvSpPr>
+          <p:cNvPr id="3" name="TextBox 2"/>
+          <p:cNvSpPr txBox="1"/>
+          <p:nvPr/>
+        </p:nvSpPr>
+        <p:spPr>
+          <a:xfrm>
+            <a:off x="502920" y="1600200"/>
+            <a:ext cx="4297680" cy="4572000"/>
+          </a:xfrm>
+          <a:prstGeom prst="rect">
+            <a:avLst/>
+          </a:prstGeom>
+          <a:noFill/>
+        </p:spPr>
+        <p:txBody>
+          <a:bodyPr wrap="square">
+            <a:spAutoFit/>
+          </a:bodyPr>
+          <a:lstStyle/>
+          <a:p>
+            <a:pPr>
+              <a:spcAft>
+                <a:spcPts val="700"/>
+              </a:spcAft>
+            </a:pPr>
+            <a:r>
+              <a:rPr sz="1800">
+                <a:latin typeface="Verdana"/>
+              </a:rPr>
+              <a:t>Set the controls, render, watch it thread or clip.</a:t>
+            </a:r>
+          </a:p>
+          <a:p>
+            <a:pPr>
+              <a:spcAft>
+                <a:spcPts val="700"/>
+              </a:spcAft>
+            </a:pPr>
+            <a:r>
+              <a:rPr sz="1500">
+                <a:latin typeface="Verdana"/>
+              </a:rPr>
+              <a:t>•  Avoidance gain, lookahead, speed</a:t>
+            </a:r>
+          </a:p>
+          <a:p>
+            <a:pPr>
+              <a:spcAft>
+                <a:spcPts val="700"/>
+              </a:spcAft>
+            </a:pPr>
+            <a:r>
+              <a:rPr sz="1500">
+                <a:latin typeface="Verdana"/>
+              </a:rPr>
+              <a:t>•  Number of cars / layout seed</a:t>
+            </a:r>
+          </a:p>
+          <a:p>
+            <a:pPr>
+              <a:spcAft>
+                <a:spcPts val="700"/>
+              </a:spcAft>
+            </a:pPr>
+            <a:r>
+              <a:rPr sz="1500">
+                <a:latin typeface="Verdana"/>
+              </a:rPr>
+              <a:t>•  Sensor noise / blackout</a:t>
+            </a:r>
+          </a:p>
+        </p:txBody>
+      </p:sp>
+      <p:pic>
+        <p:nvPicPr>
+          <p:cNvPr id="4" name="Picture 3" descr="n5_offvson.png"/>
+          <p:cNvPicPr>
+            <a:picLocks noChangeAspect="1"/>
+          </p:cNvPicPr>
+          <p:nvPr/>
+        </p:nvPicPr>
+        <p:blipFill>
+          <a:blip r:embed="rId2"/>
+          <a:stretch>
+            <a:fillRect/>
+          </a:stretch>
+        </p:blipFill>
+        <p:spPr>
+          <a:xfrm>
+            <a:off x="5079397" y="1417320"/>
+            <a:ext cx="6574726" cy="5120640"/>
+          </a:xfrm>
+          <a:prstGeom prst="rect">
+            <a:avLst/>
+          </a:prstGeom>
+        </p:spPr>
+      </p:pic>
+    </p:spTree>
+  </p:cSld>
+  <p:clrMapOvr>
+    <a:masterClrMapping/>
+  </p:clrMapOvr>
+</p:sld>
+</file>
+
+<file path=ppt/slides/slide9.xml><?xml version="1.0" encoding="utf-8"?>
+<p:sld xmlns:a="http://schemas.openxmlformats.org/drawingml/2006/main" xmlns:p="http://schemas.openxmlformats.org/presentationml/2006/main" xmlns:r="http://schemas.openxmlformats.org/officeDocument/2006/relationships">
+  <p:cSld>
+    <p:spTree>
+      <p:nvGrpSpPr>
+        <p:cNvPr id="1" name=""/>
+        <p:cNvGrpSpPr/>
+        <p:nvPr/>
+      </p:nvGrpSpPr>
+      <p:grpSpPr/>
+      <p:sp>
+        <p:nvSpPr>
+          <p:cNvPr id="2" name="Title 1"/>
+          <p:cNvSpPr>
+            <a:spLocks noGrp="1"/>
+          </p:cNvSpPr>
+          <p:nvPr>
+            <p:ph type="title"/>
+          </p:nvPr>
+        </p:nvSpPr>
+        <p:spPr/>
+        <p:txBody>
+          <a:bodyPr/>
+          <a:lstStyle/>
+          <a:p>
+            <a:r>
+              <a:rPr>
+                <a:latin typeface="Verdana"/>
+              </a:rPr>
               <a:t>What you built</a:t>
             </a:r>
           </a:p>
@@ -31462,11 +32457,11 @@
           <a:p>
             <a:pPr>
               <a:spcAft>
-                <a:spcPts val="800"/>
+                <a:spcPts val="700"/>
               </a:spcAft>
             </a:pPr>
             <a:r>
-              <a:rPr sz="1800">
+              <a:rPr sz="1900">
                 <a:latin typeface="Verdana"/>
               </a:rPr>
               <a:t>A perception-to-control stack on real data — sense, fuse, estimate, track, act.</a:t>
@@ -31475,7 +32470,7 @@
           <a:p>
             <a:pPr>
               <a:spcAft>
-                <a:spcPts val="800"/>
+                <a:spcPts val="700"/>
               </a:spcAft>
             </a:pPr>
             <a:r>
@@ -31488,7 +32483,7 @@
           <a:p>
             <a:pPr>
               <a:spcAft>
-                <a:spcPts val="800"/>
+                <a:spcPts val="700"/>
               </a:spcAft>
             </a:pPr>
             <a:r>
@@ -31501,7 +32496,7 @@
           <a:p>
             <a:pPr>
               <a:spcAft>
-                <a:spcPts val="800"/>
+                <a:spcPts val="700"/>
               </a:spcAft>
             </a:pPr>
             <a:r>
